--- a/中越詩歌/萬福源頭 Phước nguyên từ trời.pptx
+++ b/中越詩歌/萬福源頭 Phước nguyên từ trời.pptx
@@ -232,7 +232,7 @@
           <a:p>
             <a:fld id="{8DF85CA3-0141-4CE6-B6E4-CE48A46C696A}" type="datetimeFigureOut">
               <a:rPr lang="en-US" smtClean="0"/>
-              <a:t>2/8/2024</a:t>
+              <a:t>1/27/2025</a:t>
             </a:fld>
             <a:endParaRPr lang="en-US"/>
           </a:p>
@@ -677,7 +677,7 @@
           <a:p>
             <a:fld id="{D3FA001B-0209-49B1-A3DB-16BE9C3CB19D}" type="datetimeFigureOut">
               <a:rPr lang="en-US" smtClean="0"/>
-              <a:t>2/8/2024</a:t>
+              <a:t>1/27/2025</a:t>
             </a:fld>
             <a:endParaRPr lang="en-US"/>
           </a:p>
@@ -847,7 +847,7 @@
           <a:p>
             <a:fld id="{D3FA001B-0209-49B1-A3DB-16BE9C3CB19D}" type="datetimeFigureOut">
               <a:rPr lang="en-US" smtClean="0"/>
-              <a:t>2/8/2024</a:t>
+              <a:t>1/27/2025</a:t>
             </a:fld>
             <a:endParaRPr lang="en-US"/>
           </a:p>
@@ -1027,7 +1027,7 @@
           <a:p>
             <a:fld id="{D3FA001B-0209-49B1-A3DB-16BE9C3CB19D}" type="datetimeFigureOut">
               <a:rPr lang="en-US" smtClean="0"/>
-              <a:t>2/8/2024</a:t>
+              <a:t>1/27/2025</a:t>
             </a:fld>
             <a:endParaRPr lang="en-US"/>
           </a:p>
@@ -1197,7 +1197,7 @@
           <a:p>
             <a:fld id="{D3FA001B-0209-49B1-A3DB-16BE9C3CB19D}" type="datetimeFigureOut">
               <a:rPr lang="en-US" smtClean="0"/>
-              <a:t>2/8/2024</a:t>
+              <a:t>1/27/2025</a:t>
             </a:fld>
             <a:endParaRPr lang="en-US"/>
           </a:p>
@@ -1443,7 +1443,7 @@
           <a:p>
             <a:fld id="{D3FA001B-0209-49B1-A3DB-16BE9C3CB19D}" type="datetimeFigureOut">
               <a:rPr lang="en-US" smtClean="0"/>
-              <a:t>2/8/2024</a:t>
+              <a:t>1/27/2025</a:t>
             </a:fld>
             <a:endParaRPr lang="en-US"/>
           </a:p>
@@ -1731,7 +1731,7 @@
           <a:p>
             <a:fld id="{D3FA001B-0209-49B1-A3DB-16BE9C3CB19D}" type="datetimeFigureOut">
               <a:rPr lang="en-US" smtClean="0"/>
-              <a:t>2/8/2024</a:t>
+              <a:t>1/27/2025</a:t>
             </a:fld>
             <a:endParaRPr lang="en-US"/>
           </a:p>
@@ -2153,7 +2153,7 @@
           <a:p>
             <a:fld id="{D3FA001B-0209-49B1-A3DB-16BE9C3CB19D}" type="datetimeFigureOut">
               <a:rPr lang="en-US" smtClean="0"/>
-              <a:t>2/8/2024</a:t>
+              <a:t>1/27/2025</a:t>
             </a:fld>
             <a:endParaRPr lang="en-US"/>
           </a:p>
@@ -2271,7 +2271,7 @@
           <a:p>
             <a:fld id="{D3FA001B-0209-49B1-A3DB-16BE9C3CB19D}" type="datetimeFigureOut">
               <a:rPr lang="en-US" smtClean="0"/>
-              <a:t>2/8/2024</a:t>
+              <a:t>1/27/2025</a:t>
             </a:fld>
             <a:endParaRPr lang="en-US"/>
           </a:p>
@@ -2366,7 +2366,7 @@
           <a:p>
             <a:fld id="{D3FA001B-0209-49B1-A3DB-16BE9C3CB19D}" type="datetimeFigureOut">
               <a:rPr lang="en-US" smtClean="0"/>
-              <a:t>2/8/2024</a:t>
+              <a:t>1/27/2025</a:t>
             </a:fld>
             <a:endParaRPr lang="en-US"/>
           </a:p>
@@ -2643,7 +2643,7 @@
           <a:p>
             <a:fld id="{D3FA001B-0209-49B1-A3DB-16BE9C3CB19D}" type="datetimeFigureOut">
               <a:rPr lang="en-US" smtClean="0"/>
-              <a:t>2/8/2024</a:t>
+              <a:t>1/27/2025</a:t>
             </a:fld>
             <a:endParaRPr lang="en-US"/>
           </a:p>
@@ -2900,7 +2900,7 @@
           <a:p>
             <a:fld id="{D3FA001B-0209-49B1-A3DB-16BE9C3CB19D}" type="datetimeFigureOut">
               <a:rPr lang="en-US" smtClean="0"/>
-              <a:t>2/8/2024</a:t>
+              <a:t>1/27/2025</a:t>
             </a:fld>
             <a:endParaRPr lang="en-US"/>
           </a:p>
@@ -3116,7 +3116,7 @@
           <a:p>
             <a:fld id="{D3FA001B-0209-49B1-A3DB-16BE9C3CB19D}" type="datetimeFigureOut">
               <a:rPr lang="en-US" smtClean="0"/>
-              <a:t>2/8/2024</a:t>
+              <a:t>1/27/2025</a:t>
             </a:fld>
             <a:endParaRPr lang="en-US"/>
           </a:p>
@@ -3746,6 +3746,24 @@
                 <a:cs typeface="Calibri" panose="020F0502020204030204" pitchFamily="34" charset="0"/>
               </a:rPr>
               <a:t>Trời</a:t>
+            </a:r>
+            <a:r>
+              <a:rPr lang="en-US" sz="5400" b="1" i="1" dirty="0">
+                <a:solidFill>
+                  <a:srgbClr val="FF0000"/>
+                </a:solidFill>
+                <a:effectLst>
+                  <a:outerShdw blurRad="38100" dist="38100" dir="2700000" algn="tl">
+                    <a:srgbClr val="000000">
+                      <a:alpha val="43137"/>
+                    </a:srgbClr>
+                  </a:outerShdw>
+                </a:effectLst>
+                <a:latin typeface="Calibri" panose="020F0502020204030204" pitchFamily="34" charset="0"/>
+                <a:ea typeface="微軟正黑體" pitchFamily="34" charset="-120"/>
+                <a:cs typeface="Calibri" panose="020F0502020204030204" pitchFamily="34" charset="0"/>
+              </a:rPr>
+              <a:t> (TC 28)</a:t>
             </a:r>
             <a:endParaRPr lang="zh-TW" altLang="en-US" sz="5400" b="1" i="1" dirty="0">
               <a:solidFill>
